--- a/curriculum/M01/W08/L03/slides.pptx
+++ b/curriculum/M01/W08/L03/slides.pptx
@@ -7177,7 +7177,7 @@
                 <a:ea typeface="Malgun Gothic"/>
                 <a:cs typeface="Malgun Gothic"/>
               </a:rPr>
-              <a:t>1. 세포질에서 importin이 NLS를 가진 기질과 결합한다. Ran-GTP 농도가 낮으므로 결합이 유지된다. 2. 복합체가 핵공을 통과한다. 3. 핵 안에서 Ran-GTP가 importin에 결합하고, 그 결합이 기질을 밀어낸다. 기질이 핵에 남는다. 4. Importin은 Ran-GTP를 달고 세포질로 돌아온다. 5. 세포질에서 RanGAP이 GTP를 가수분해하면 Ran-GDP가 떨어지고, importin이 다음 기질을 받을 수 있는 상태가 된다.</a:t>
+              <a:t>1. 세포질에서 importin이 NLS를 가진 기질과 결합한다. Ran-GTP 농도가 낮으므로 결합이 유지된다.</a:t>
             </a:r>
           </a:p>
           <a:p>
@@ -7198,15 +7198,15 @@
               <a:t>•  </a:t>
             </a:r>
             <a:r>
-              <a:rPr sz="1400" b="1" i="0">
-                <a:solidFill>
-                  <a:srgbClr val="11202B"/>
-                </a:solidFill>
-                <a:latin typeface="Malgun Gothic"/>
-                <a:ea typeface="Malgun Gothic"/>
-                <a:cs typeface="Malgun Gothic"/>
-              </a:rPr>
-              <a:t>내보내기(export)의 주기</a:t>
+              <a:rPr sz="1400" b="0" i="0">
+                <a:solidFill>
+                  <a:srgbClr val="11202B"/>
+                </a:solidFill>
+                <a:latin typeface="Malgun Gothic"/>
+                <a:ea typeface="Malgun Gothic"/>
+                <a:cs typeface="Malgun Gothic"/>
+              </a:rPr>
+              <a:t>2. 복합체가 핵공을 통과한다.</a:t>
             </a:r>
           </a:p>
           <a:p>
@@ -7235,18 +7235,25 @@
                 <a:ea typeface="Malgun Gothic"/>
                 <a:cs typeface="Malgun Gothic"/>
               </a:rPr>
-              <a:t>1. 핵 안에서 exportin이 NES를 가진 기질과 </a:t>
-            </a:r>
+              <a:t>3. 핵 안에서 Ran-GTP가 importin에 결합하고, 그 결합이 기질을 밀어낸다. 기질이 핵에 남는다.</a:t>
+            </a:r>
+          </a:p>
+          <a:p>
+            <a:pPr>
+              <a:spcAft>
+                <a:spcPts val="900"/>
+              </a:spcAft>
+            </a:pPr>
             <a:r>
               <a:rPr sz="1400" b="1" i="0">
                 <a:solidFill>
-                  <a:srgbClr val="11202B"/>
-                </a:solidFill>
-                <a:latin typeface="Malgun Gothic"/>
-                <a:ea typeface="Malgun Gothic"/>
-                <a:cs typeface="Malgun Gothic"/>
-              </a:rPr>
-              <a:t>Ran-GTP와 함께</a:t>
+                  <a:srgbClr val="F2B705"/>
+                </a:solidFill>
+                <a:latin typeface="Malgun Gothic"/>
+                <a:ea typeface="Malgun Gothic"/>
+                <a:cs typeface="Malgun Gothic"/>
+              </a:rPr>
+              <a:t>•  </a:t>
             </a:r>
             <a:r>
               <a:rPr sz="1400" b="0" i="0">
@@ -7257,7 +7264,65 @@
                 <a:ea typeface="Malgun Gothic"/>
                 <a:cs typeface="Malgun Gothic"/>
               </a:rPr>
-              <a:t> 삼중 복합체를 이룬다. Exportin은 Ran-GTP가 있을 때 기질에 대한 친화도가 높다. 2. 복합체가 핵공을 통과한다. 3. 세포질에서 GTP가 가수분해되면 복합체가 풀려 기질이 세포질에 놓인다. 4. Exportin이 핵으로 돌아간다.</a:t>
+              <a:t>4. Importin은 Ran-GTP를 달고 세포질로 돌아온다.</a:t>
+            </a:r>
+          </a:p>
+          <a:p>
+            <a:pPr>
+              <a:spcAft>
+                <a:spcPts val="900"/>
+              </a:spcAft>
+            </a:pPr>
+            <a:r>
+              <a:rPr sz="1400" b="1" i="0">
+                <a:solidFill>
+                  <a:srgbClr val="F2B705"/>
+                </a:solidFill>
+                <a:latin typeface="Malgun Gothic"/>
+                <a:ea typeface="Malgun Gothic"/>
+                <a:cs typeface="Malgun Gothic"/>
+              </a:rPr>
+              <a:t>•  </a:t>
+            </a:r>
+            <a:r>
+              <a:rPr sz="1400" b="0" i="0">
+                <a:solidFill>
+                  <a:srgbClr val="11202B"/>
+                </a:solidFill>
+                <a:latin typeface="Malgun Gothic"/>
+                <a:ea typeface="Malgun Gothic"/>
+                <a:cs typeface="Malgun Gothic"/>
+              </a:rPr>
+              <a:t>5. 세포질에서 RanGAP이 GTP를 가수분해하면 Ran-GDP가 떨어지고, importin이 다음 기질을 받을 수 있는 상태가 된다.</a:t>
+            </a:r>
+          </a:p>
+          <a:p>
+            <a:pPr>
+              <a:spcAft>
+                <a:spcPts val="900"/>
+              </a:spcAft>
+            </a:pPr>
+            <a:r>
+              <a:rPr sz="1400" b="1" i="0">
+                <a:solidFill>
+                  <a:srgbClr val="F2B705"/>
+                </a:solidFill>
+                <a:latin typeface="Malgun Gothic"/>
+                <a:ea typeface="Malgun Gothic"/>
+                <a:cs typeface="Malgun Gothic"/>
+              </a:rPr>
+              <a:t>•  </a:t>
+            </a:r>
+            <a:r>
+              <a:rPr sz="1400" b="1" i="0">
+                <a:solidFill>
+                  <a:srgbClr val="11202B"/>
+                </a:solidFill>
+                <a:latin typeface="Malgun Gothic"/>
+                <a:ea typeface="Malgun Gothic"/>
+                <a:cs typeface="Malgun Gothic"/>
+              </a:rPr>
+              <a:t>내보내기(export)의 주기</a:t>
             </a:r>
           </a:p>
         </p:txBody>
@@ -7534,7 +7599,7 @@
               </a:spcAft>
             </a:pPr>
             <a:r>
-              <a:rPr sz="2000" b="1" i="0">
+              <a:rPr sz="1800" b="1" i="0">
                 <a:solidFill>
                   <a:srgbClr val="F2B705"/>
                 </a:solidFill>
@@ -7545,7 +7610,145 @@
               <a:t>•  </a:t>
             </a:r>
             <a:r>
-              <a:rPr sz="2000" b="0" i="0">
+              <a:rPr sz="1800" b="0" i="0">
+                <a:solidFill>
+                  <a:srgbClr val="11202B"/>
+                </a:solidFill>
+                <a:latin typeface="Malgun Gothic"/>
+                <a:ea typeface="Malgun Gothic"/>
+                <a:cs typeface="Malgun Gothic"/>
+              </a:rPr>
+              <a:t>1. 핵 안에서 exportin이 NES를 가진 기질과 </a:t>
+            </a:r>
+            <a:r>
+              <a:rPr sz="1800" b="1" i="0">
+                <a:solidFill>
+                  <a:srgbClr val="11202B"/>
+                </a:solidFill>
+                <a:latin typeface="Malgun Gothic"/>
+                <a:ea typeface="Malgun Gothic"/>
+                <a:cs typeface="Malgun Gothic"/>
+              </a:rPr>
+              <a:t>Ran-GTP와 함께</a:t>
+            </a:r>
+            <a:r>
+              <a:rPr sz="1800" b="0" i="0">
+                <a:solidFill>
+                  <a:srgbClr val="11202B"/>
+                </a:solidFill>
+                <a:latin typeface="Malgun Gothic"/>
+                <a:ea typeface="Malgun Gothic"/>
+                <a:cs typeface="Malgun Gothic"/>
+              </a:rPr>
+              <a:t> 삼중 복합체를 이룬다. Exportin은 Ran-GTP가 있을 때 기질에 대한 친화도가 높다.</a:t>
+            </a:r>
+          </a:p>
+          <a:p>
+            <a:pPr>
+              <a:spcAft>
+                <a:spcPts val="900"/>
+              </a:spcAft>
+            </a:pPr>
+            <a:r>
+              <a:rPr sz="1800" b="1" i="0">
+                <a:solidFill>
+                  <a:srgbClr val="F2B705"/>
+                </a:solidFill>
+                <a:latin typeface="Malgun Gothic"/>
+                <a:ea typeface="Malgun Gothic"/>
+                <a:cs typeface="Malgun Gothic"/>
+              </a:rPr>
+              <a:t>•  </a:t>
+            </a:r>
+            <a:r>
+              <a:rPr sz="1800" b="0" i="0">
+                <a:solidFill>
+                  <a:srgbClr val="11202B"/>
+                </a:solidFill>
+                <a:latin typeface="Malgun Gothic"/>
+                <a:ea typeface="Malgun Gothic"/>
+                <a:cs typeface="Malgun Gothic"/>
+              </a:rPr>
+              <a:t>2. 복합체가 핵공을 통과한다.</a:t>
+            </a:r>
+          </a:p>
+          <a:p>
+            <a:pPr>
+              <a:spcAft>
+                <a:spcPts val="900"/>
+              </a:spcAft>
+            </a:pPr>
+            <a:r>
+              <a:rPr sz="1800" b="1" i="0">
+                <a:solidFill>
+                  <a:srgbClr val="F2B705"/>
+                </a:solidFill>
+                <a:latin typeface="Malgun Gothic"/>
+                <a:ea typeface="Malgun Gothic"/>
+                <a:cs typeface="Malgun Gothic"/>
+              </a:rPr>
+              <a:t>•  </a:t>
+            </a:r>
+            <a:r>
+              <a:rPr sz="1800" b="0" i="0">
+                <a:solidFill>
+                  <a:srgbClr val="11202B"/>
+                </a:solidFill>
+                <a:latin typeface="Malgun Gothic"/>
+                <a:ea typeface="Malgun Gothic"/>
+                <a:cs typeface="Malgun Gothic"/>
+              </a:rPr>
+              <a:t>3. 세포질에서 GTP가 가수분해되면 복합체가 풀려 기질이 세포질에 놓인다.</a:t>
+            </a:r>
+          </a:p>
+          <a:p>
+            <a:pPr>
+              <a:spcAft>
+                <a:spcPts val="900"/>
+              </a:spcAft>
+            </a:pPr>
+            <a:r>
+              <a:rPr sz="1800" b="1" i="0">
+                <a:solidFill>
+                  <a:srgbClr val="F2B705"/>
+                </a:solidFill>
+                <a:latin typeface="Malgun Gothic"/>
+                <a:ea typeface="Malgun Gothic"/>
+                <a:cs typeface="Malgun Gothic"/>
+              </a:rPr>
+              <a:t>•  </a:t>
+            </a:r>
+            <a:r>
+              <a:rPr sz="1800" b="0" i="0">
+                <a:solidFill>
+                  <a:srgbClr val="11202B"/>
+                </a:solidFill>
+                <a:latin typeface="Malgun Gothic"/>
+                <a:ea typeface="Malgun Gothic"/>
+                <a:cs typeface="Malgun Gothic"/>
+              </a:rPr>
+              <a:t>4. Exportin이 핵으로 돌아간다.</a:t>
+            </a:r>
+          </a:p>
+          <a:p>
+            <a:pPr>
+              <a:spcAft>
+                <a:spcPts val="900"/>
+              </a:spcAft>
+            </a:pPr>
+            <a:r>
+              <a:rPr sz="1800" b="1" i="0">
+                <a:solidFill>
+                  <a:srgbClr val="F2B705"/>
+                </a:solidFill>
+                <a:latin typeface="Malgun Gothic"/>
+                <a:ea typeface="Malgun Gothic"/>
+                <a:cs typeface="Malgun Gothic"/>
+              </a:rPr>
+              <a:t>•  </a:t>
+            </a:r>
+            <a:r>
+              <a:rPr sz="1800" b="0" i="0">
                 <a:solidFill>
                   <a:srgbClr val="11202B"/>
                 </a:solidFill>
@@ -7556,7 +7759,7 @@
               <a:t>두 주기를 나란히 보면 원리가 하나로 보인다. </a:t>
             </a:r>
             <a:r>
-              <a:rPr sz="2000" b="1" i="0">
+              <a:rPr sz="1800" b="1" i="0">
                 <a:solidFill>
                   <a:srgbClr val="11202B"/>
                 </a:solidFill>
@@ -7567,7 +7770,7 @@
               <a:t>Ran-GTP는 importin에게 "놓아라", exportin에게 "잡아라"라는 같은 신호로 작동한다.</a:t>
             </a:r>
             <a:r>
-              <a:rPr sz="2000" b="0" i="0">
+              <a:rPr sz="1800" b="0" i="0">
                 <a:solidFill>
                   <a:srgbClr val="11202B"/>
                 </a:solidFill>
@@ -15838,7 +16041,94 @@
                 <a:ea typeface="Malgun Gothic"/>
                 <a:cs typeface="Malgun Gothic"/>
               </a:rPr>
-              <a:t>가 활성화되어 lamin의 특정 serine을 인산화한다. 인산화된 lamin은 중합 상태를 유지하지 못하고 풀어진다. 2. 핵공 복합체의 nucleoporin도 인산화되어 복합체가 조각으로 해체된다. 3. 내막 단백질이 염색질에서 떨어지고, 핵막은 소포체 막에 흡수되어 구별되지 않는다. 4. 염색체가 응축되어 방추에 붙는다.</a:t>
+              <a:t>가 활성화되어 lamin의 특정 serine을 인산화한다. 인산화된 lamin은 중합 상태를 유지하지 못하고 풀어진다.</a:t>
+            </a:r>
+          </a:p>
+          <a:p>
+            <a:pPr>
+              <a:spcAft>
+                <a:spcPts val="900"/>
+              </a:spcAft>
+            </a:pPr>
+            <a:r>
+              <a:rPr sz="1400" b="1" i="0">
+                <a:solidFill>
+                  <a:srgbClr val="F2B705"/>
+                </a:solidFill>
+                <a:latin typeface="Malgun Gothic"/>
+                <a:ea typeface="Malgun Gothic"/>
+                <a:cs typeface="Malgun Gothic"/>
+              </a:rPr>
+              <a:t>•  </a:t>
+            </a:r>
+            <a:r>
+              <a:rPr sz="1400" b="0" i="0">
+                <a:solidFill>
+                  <a:srgbClr val="11202B"/>
+                </a:solidFill>
+                <a:latin typeface="Malgun Gothic"/>
+                <a:ea typeface="Malgun Gothic"/>
+                <a:cs typeface="Malgun Gothic"/>
+              </a:rPr>
+              <a:t>2. 핵공 복합체의 nucleoporin도 인산화되어 복합체가 조각으로 해체된다.</a:t>
+            </a:r>
+          </a:p>
+          <a:p>
+            <a:pPr>
+              <a:spcAft>
+                <a:spcPts val="900"/>
+              </a:spcAft>
+            </a:pPr>
+            <a:r>
+              <a:rPr sz="1400" b="1" i="0">
+                <a:solidFill>
+                  <a:srgbClr val="F2B705"/>
+                </a:solidFill>
+                <a:latin typeface="Malgun Gothic"/>
+                <a:ea typeface="Malgun Gothic"/>
+                <a:cs typeface="Malgun Gothic"/>
+              </a:rPr>
+              <a:t>•  </a:t>
+            </a:r>
+            <a:r>
+              <a:rPr sz="1400" b="0" i="0">
+                <a:solidFill>
+                  <a:srgbClr val="11202B"/>
+                </a:solidFill>
+                <a:latin typeface="Malgun Gothic"/>
+                <a:ea typeface="Malgun Gothic"/>
+                <a:cs typeface="Malgun Gothic"/>
+              </a:rPr>
+              <a:t>3. 내막 단백질이 염색질에서 떨어지고, 핵막은 소포체 막에 흡수되어 구별되지 않는다.</a:t>
+            </a:r>
+          </a:p>
+          <a:p>
+            <a:pPr>
+              <a:spcAft>
+                <a:spcPts val="900"/>
+              </a:spcAft>
+            </a:pPr>
+            <a:r>
+              <a:rPr sz="1400" b="1" i="0">
+                <a:solidFill>
+                  <a:srgbClr val="F2B705"/>
+                </a:solidFill>
+                <a:latin typeface="Malgun Gothic"/>
+                <a:ea typeface="Malgun Gothic"/>
+                <a:cs typeface="Malgun Gothic"/>
+              </a:rPr>
+              <a:t>•  </a:t>
+            </a:r>
+            <a:r>
+              <a:rPr sz="1400" b="0" i="0">
+                <a:solidFill>
+                  <a:srgbClr val="11202B"/>
+                </a:solidFill>
+                <a:latin typeface="Malgun Gothic"/>
+                <a:ea typeface="Malgun Gothic"/>
+                <a:cs typeface="Malgun Gothic"/>
+              </a:rPr>
+              <a:t>4. 염색체가 응축되어 방추에 붙는다.</a:t>
             </a:r>
           </a:p>
           <a:p>
@@ -17262,7 +17552,7 @@
               </a:spcAft>
             </a:pPr>
             <a:r>
-              <a:rPr sz="1600" b="1" i="0">
+              <a:rPr sz="1400" b="1" i="0">
                 <a:solidFill>
                   <a:srgbClr val="F2B705"/>
                 </a:solidFill>
@@ -17273,7 +17563,7 @@
               <a:t>•  </a:t>
             </a:r>
             <a:r>
-              <a:rPr sz="1600" b="0" i="0">
+              <a:rPr sz="1400" b="0" i="0">
                 <a:solidFill>
                   <a:srgbClr val="11202B"/>
                 </a:solidFill>
@@ -17284,7 +17574,7 @@
               <a:t>핵막과 핵공은 치료와 감염 양쪽에서 전선이 된다. 이 절은 앞의 절들에서 흩어져 나온 예들을 하나의 틀로 정리한다. 기준은 </a:t>
             </a:r>
             <a:r>
-              <a:rPr sz="1600" b="1" i="0">
+              <a:rPr sz="1400" b="1" i="0">
                 <a:solidFill>
                   <a:srgbClr val="11202B"/>
                 </a:solidFill>
@@ -17295,7 +17585,7 @@
               <a:t>어느 단계를 건드리는가</a:t>
             </a:r>
             <a:r>
-              <a:rPr sz="1600" b="0" i="0">
+              <a:rPr sz="1400" b="0" i="0">
                 <a:solidFill>
                   <a:srgbClr val="11202B"/>
                 </a:solidFill>
@@ -17313,7 +17603,7 @@
               </a:spcAft>
             </a:pPr>
             <a:r>
-              <a:rPr sz="1600" b="1" i="0">
+              <a:rPr sz="1400" b="1" i="0">
                 <a:solidFill>
                   <a:srgbClr val="F2B705"/>
                 </a:solidFill>
@@ -17324,7 +17614,7 @@
               <a:t>•  </a:t>
             </a:r>
             <a:r>
-              <a:rPr sz="1600" b="1" i="0">
+              <a:rPr sz="1400" b="1" i="0">
                 <a:solidFill>
                   <a:srgbClr val="11202B"/>
                 </a:solidFill>
@@ -17335,7 +17625,7 @@
               <a:t>숙주의 수송을 막는 약물.</a:t>
             </a:r>
             <a:r>
-              <a:rPr sz="1600" b="0" i="0">
+              <a:rPr sz="1400" b="0" i="0">
                 <a:solidFill>
                   <a:srgbClr val="11202B"/>
                 </a:solidFill>
@@ -17346,7 +17636,7 @@
               <a:t> CRM1(XPO1)을 억제하는 selinexor는 핵 수출을 막아 종양 억제 단백질을 핵에 붙잡아 둔다. 반대로 들여오기를 막는 저분자도 개발되었는데, 들여오기는 생존에 필수적인 과정이 많아 치료 범위를 잡기 어렵다. 수송 억제가 성립하는 조건이 여기서 드러난다. </a:t>
             </a:r>
             <a:r>
-              <a:rPr sz="1600" b="1" i="0">
+              <a:rPr sz="1400" b="1" i="0">
                 <a:solidFill>
                   <a:srgbClr val="11202B"/>
                 </a:solidFill>
@@ -17357,7 +17647,7 @@
               <a:t>종양이 정상 세포보다 그 수송에 더 의존하고 있을 때만</a:t>
             </a:r>
             <a:r>
-              <a:rPr sz="1600" b="0" i="0">
+              <a:rPr sz="1400" b="0" i="0">
                 <a:solidFill>
                   <a:srgbClr val="11202B"/>
                 </a:solidFill>
@@ -17375,7 +17665,7 @@
               </a:spcAft>
             </a:pPr>
             <a:r>
-              <a:rPr sz="1600" b="1" i="0">
+              <a:rPr sz="1400" b="1" i="0">
                 <a:solidFill>
                   <a:srgbClr val="F2B705"/>
                 </a:solidFill>
@@ -17386,7 +17676,7 @@
               <a:t>•  </a:t>
             </a:r>
             <a:r>
-              <a:rPr sz="1600" b="1" i="0">
+              <a:rPr sz="1400" b="1" i="0">
                 <a:solidFill>
                   <a:srgbClr val="11202B"/>
                 </a:solidFill>
@@ -17397,7 +17687,7 @@
               <a:t>수송 조절을 건드리는 약물.</a:t>
             </a:r>
             <a:r>
-              <a:rPr sz="1600" b="0" i="0">
+              <a:rPr sz="1400" b="0" i="0">
                 <a:solidFill>
                   <a:srgbClr val="11202B"/>
                 </a:solidFill>
@@ -17415,7 +17705,7 @@
               </a:spcAft>
             </a:pPr>
             <a:r>
-              <a:rPr sz="1600" b="1" i="0">
+              <a:rPr sz="1400" b="1" i="0">
                 <a:solidFill>
                   <a:srgbClr val="F2B705"/>
                 </a:solidFill>
@@ -17426,7 +17716,7 @@
               <a:t>•  </a:t>
             </a:r>
             <a:r>
-              <a:rPr sz="1600" b="1" i="0">
+              <a:rPr sz="1400" b="1" i="0">
                 <a:solidFill>
                   <a:srgbClr val="11202B"/>
                 </a:solidFill>
@@ -17437,7 +17727,7 @@
               <a:t>바이러스의 전략.</a:t>
             </a:r>
             <a:r>
-              <a:rPr sz="1600" b="0" i="0">
+              <a:rPr sz="1400" b="0" i="0">
                 <a:solidFill>
                   <a:srgbClr val="11202B"/>
                 </a:solidFill>
@@ -17446,6 +17736,108 @@
                 <a:cs typeface="Malgun Gothic"/>
               </a:rPr>
               <a:t> 네 가지로 나뉜다.</a:t>
+            </a:r>
+          </a:p>
+          <a:p>
+            <a:pPr>
+              <a:spcAft>
+                <a:spcPts val="900"/>
+              </a:spcAft>
+            </a:pPr>
+            <a:r>
+              <a:rPr sz="1400" b="1" i="0">
+                <a:solidFill>
+                  <a:srgbClr val="F2B705"/>
+                </a:solidFill>
+                <a:latin typeface="Malgun Gothic"/>
+                <a:ea typeface="Malgun Gothic"/>
+                <a:cs typeface="Malgun Gothic"/>
+              </a:rPr>
+              <a:t>•  </a:t>
+            </a:r>
+            <a:r>
+              <a:rPr sz="1400" b="0" i="0">
+                <a:solidFill>
+                  <a:srgbClr val="11202B"/>
+                </a:solidFill>
+                <a:latin typeface="Malgun Gothic"/>
+                <a:ea typeface="Malgun Gothic"/>
+                <a:cs typeface="Malgun Gothic"/>
+              </a:rPr>
+              <a:t>1. </a:t>
+            </a:r>
+            <a:r>
+              <a:rPr sz="1400" b="1" i="0">
+                <a:solidFill>
+                  <a:srgbClr val="11202B"/>
+                </a:solidFill>
+                <a:latin typeface="Malgun Gothic"/>
+                <a:ea typeface="Malgun Gothic"/>
+                <a:cs typeface="Malgun Gothic"/>
+              </a:rPr>
+              <a:t>핵으로 들어가기.</a:t>
+            </a:r>
+            <a:r>
+              <a:rPr sz="1400" b="0" i="0">
+                <a:solidFill>
+                  <a:srgbClr val="11202B"/>
+                </a:solidFill>
+                <a:latin typeface="Malgun Gothic"/>
+                <a:ea typeface="Malgun Gothic"/>
+                <a:cs typeface="Malgun Gothic"/>
+              </a:rPr>
+              <a:t> 유전체를 핵에서 복제하는 바이러스는 핵막을 넘어야 한다. Lentivirus는 capsid가 핵공과 상호작용해 분열하지 않는 세포에도 들어가고, herpesvirus는 핵공 앞에서 capsid를 열어 유전체만 통과시킨다. Influenza는 vRNP에 NLS를 두어 숙주의 importin에 실려 들어간다.</a:t>
+            </a:r>
+          </a:p>
+          <a:p>
+            <a:pPr>
+              <a:spcAft>
+                <a:spcPts val="900"/>
+              </a:spcAft>
+            </a:pPr>
+            <a:r>
+              <a:rPr sz="1400" b="1" i="0">
+                <a:solidFill>
+                  <a:srgbClr val="F2B705"/>
+                </a:solidFill>
+                <a:latin typeface="Malgun Gothic"/>
+                <a:ea typeface="Malgun Gothic"/>
+                <a:cs typeface="Malgun Gothic"/>
+              </a:rPr>
+              <a:t>•  </a:t>
+            </a:r>
+            <a:r>
+              <a:rPr sz="1400" b="0" i="0">
+                <a:solidFill>
+                  <a:srgbClr val="11202B"/>
+                </a:solidFill>
+                <a:latin typeface="Malgun Gothic"/>
+                <a:ea typeface="Malgun Gothic"/>
+                <a:cs typeface="Malgun Gothic"/>
+              </a:rPr>
+              <a:t>2. </a:t>
+            </a:r>
+            <a:r>
+              <a:rPr sz="1400" b="1" i="0">
+                <a:solidFill>
+                  <a:srgbClr val="11202B"/>
+                </a:solidFill>
+                <a:latin typeface="Malgun Gothic"/>
+                <a:ea typeface="Malgun Gothic"/>
+                <a:cs typeface="Malgun Gothic"/>
+              </a:rPr>
+              <a:t>품질 관문을 우회해 나오기.</a:t>
+            </a:r>
+            <a:r>
+              <a:rPr sz="1400" b="0" i="0">
+                <a:solidFill>
+                  <a:srgbClr val="11202B"/>
+                </a:solidFill>
+                <a:latin typeface="Malgun Gothic"/>
+                <a:ea typeface="Malgun Gothic"/>
+                <a:cs typeface="Malgun Gothic"/>
+              </a:rPr>
+              <a:t> HIV-1의 Rev는 NES를 가지고 CRM1을 이용해, splicing이 완료되지 않은 전사체를 내보낸다. 숙주의 "가공을 거친 것만 내보낸다"는 규칙을 깨는 것이다.</a:t>
             </a:r>
           </a:p>
         </p:txBody>
@@ -17722,7 +18114,7 @@
               </a:spcAft>
             </a:pPr>
             <a:r>
-              <a:rPr sz="1600" b="1" i="0">
+              <a:rPr sz="1800" b="1" i="0">
                 <a:solidFill>
                   <a:srgbClr val="F2B705"/>
                 </a:solidFill>
@@ -17733,62 +18125,18 @@
               <a:t>•  </a:t>
             </a:r>
             <a:r>
-              <a:rPr sz="1600" b="0" i="0">
-                <a:solidFill>
-                  <a:srgbClr val="11202B"/>
-                </a:solidFill>
-                <a:latin typeface="Malgun Gothic"/>
-                <a:ea typeface="Malgun Gothic"/>
-                <a:cs typeface="Malgun Gothic"/>
-              </a:rPr>
-              <a:t>1. </a:t>
-            </a:r>
-            <a:r>
-              <a:rPr sz="1600" b="1" i="0">
-                <a:solidFill>
-                  <a:srgbClr val="11202B"/>
-                </a:solidFill>
-                <a:latin typeface="Malgun Gothic"/>
-                <a:ea typeface="Malgun Gothic"/>
-                <a:cs typeface="Malgun Gothic"/>
-              </a:rPr>
-              <a:t>핵으로 들어가기.</a:t>
-            </a:r>
-            <a:r>
-              <a:rPr sz="1600" b="0" i="0">
-                <a:solidFill>
-                  <a:srgbClr val="11202B"/>
-                </a:solidFill>
-                <a:latin typeface="Malgun Gothic"/>
-                <a:ea typeface="Malgun Gothic"/>
-                <a:cs typeface="Malgun Gothic"/>
-              </a:rPr>
-              <a:t> 유전체를 핵에서 복제하는 바이러스는 핵막을 넘어야 한다. Lentivirus는 capsid가 핵공과 상호작용해 분열하지 않는 세포에도 들어가고, herpesvirus는 핵공 앞에서 capsid를 열어 유전체만 통과시킨다. Influenza는 vRNP에 NLS를 두어 숙주의 importin에 실려 들어간다. 2. </a:t>
-            </a:r>
-            <a:r>
-              <a:rPr sz="1600" b="1" i="0">
-                <a:solidFill>
-                  <a:srgbClr val="11202B"/>
-                </a:solidFill>
-                <a:latin typeface="Malgun Gothic"/>
-                <a:ea typeface="Malgun Gothic"/>
-                <a:cs typeface="Malgun Gothic"/>
-              </a:rPr>
-              <a:t>품질 관문을 우회해 나오기.</a:t>
-            </a:r>
-            <a:r>
-              <a:rPr sz="1600" b="0" i="0">
-                <a:solidFill>
-                  <a:srgbClr val="11202B"/>
-                </a:solidFill>
-                <a:latin typeface="Malgun Gothic"/>
-                <a:ea typeface="Malgun Gothic"/>
-                <a:cs typeface="Malgun Gothic"/>
-              </a:rPr>
-              <a:t> HIV-1의 Rev는 NES를 가지고 CRM1을 이용해, splicing이 완료되지 않은 전사체를 내보낸다. 숙주의 "가공을 거친 것만 내보낸다"는 규칙을 깨는 것이다. 3. </a:t>
-            </a:r>
-            <a:r>
-              <a:rPr sz="1600" b="1" i="0">
+              <a:rPr sz="1800" b="0" i="0">
+                <a:solidFill>
+                  <a:srgbClr val="11202B"/>
+                </a:solidFill>
+                <a:latin typeface="Malgun Gothic"/>
+                <a:ea typeface="Malgun Gothic"/>
+                <a:cs typeface="Malgun Gothic"/>
+              </a:rPr>
+              <a:t>3. </a:t>
+            </a:r>
+            <a:r>
+              <a:rPr sz="1800" b="1" i="0">
                 <a:solidFill>
                   <a:srgbClr val="11202B"/>
                 </a:solidFill>
@@ -17799,18 +18147,47 @@
               <a:t>숙주의 수송을 막기.</a:t>
             </a:r>
             <a:r>
-              <a:rPr sz="1600" b="0" i="0">
-                <a:solidFill>
-                  <a:srgbClr val="11202B"/>
-                </a:solidFill>
-                <a:latin typeface="Malgun Gothic"/>
-                <a:ea typeface="Malgun Gothic"/>
-                <a:cs typeface="Malgun Gothic"/>
-              </a:rPr>
-              <a:t> 자기 RNA만 내보내고 숙주의 mRNA 수출을 차단하는 전략이다. Poliovirus와 rhinovirus의 protease는 FG 반복을 가진 nucleoporin을 잘라 핵공의 선택성을 무너뜨린다. 4. </a:t>
-            </a:r>
-            <a:r>
-              <a:rPr sz="1600" b="1" i="0">
+              <a:rPr sz="1800" b="0" i="0">
+                <a:solidFill>
+                  <a:srgbClr val="11202B"/>
+                </a:solidFill>
+                <a:latin typeface="Malgun Gothic"/>
+                <a:ea typeface="Malgun Gothic"/>
+                <a:cs typeface="Malgun Gothic"/>
+              </a:rPr>
+              <a:t> 자기 RNA만 내보내고 숙주의 mRNA 수출을 차단하는 전략이다. Poliovirus와 rhinovirus의 protease는 FG 반복을 가진 nucleoporin을 잘라 핵공의 선택성을 무너뜨린다.</a:t>
+            </a:r>
+          </a:p>
+          <a:p>
+            <a:pPr>
+              <a:spcAft>
+                <a:spcPts val="900"/>
+              </a:spcAft>
+            </a:pPr>
+            <a:r>
+              <a:rPr sz="1800" b="1" i="0">
+                <a:solidFill>
+                  <a:srgbClr val="F2B705"/>
+                </a:solidFill>
+                <a:latin typeface="Malgun Gothic"/>
+                <a:ea typeface="Malgun Gothic"/>
+                <a:cs typeface="Malgun Gothic"/>
+              </a:rPr>
+              <a:t>•  </a:t>
+            </a:r>
+            <a:r>
+              <a:rPr sz="1800" b="0" i="0">
+                <a:solidFill>
+                  <a:srgbClr val="11202B"/>
+                </a:solidFill>
+                <a:latin typeface="Malgun Gothic"/>
+                <a:ea typeface="Malgun Gothic"/>
+                <a:cs typeface="Malgun Gothic"/>
+              </a:rPr>
+              <a:t>4. </a:t>
+            </a:r>
+            <a:r>
+              <a:rPr sz="1800" b="1" i="0">
                 <a:solidFill>
                   <a:srgbClr val="11202B"/>
                 </a:solidFill>
@@ -17821,7 +18198,7 @@
               <a:t>면역 신호 전달을 끊기.</a:t>
             </a:r>
             <a:r>
-              <a:rPr sz="1600" b="0" i="0">
+              <a:rPr sz="1800" b="0" i="0">
                 <a:solidFill>
                   <a:srgbClr val="11202B"/>
                 </a:solidFill>
